--- a/research/poc/PP-04/artifacts/pp04-output.pptx
+++ b/research/poc/PP-04/artifacts/pp04-output.pptx
@@ -5,7 +5,7 @@
     <p:sldMasterId id="2147483648" r:id="rId1"/>
   </p:sldMasterIdLst>
   <p:sldIdLst>
-    <p:sldId id="256" r:id="R6975a8e2f06c421f"/>
+    <p:sldId id="256" r:id="Rfc4adf49aa634ff8"/>
   </p:sldIdLst>
   <p:sldSz cx="9144000" cy="6858000" type="screen4x3"/>
   <p:notesSz cx="6858000" cy="9144000"/>

--- a/research/poc/PP-04/artifacts/pp04-output.pptx
+++ b/research/poc/PP-04/artifacts/pp04-output.pptx
@@ -5,7 +5,7 @@
     <p:sldMasterId id="2147483648" r:id="rId1"/>
   </p:sldMasterIdLst>
   <p:sldIdLst>
-    <p:sldId id="256" r:id="Rfc4adf49aa634ff8"/>
+    <p:sldId id="256" r:id="R3ea05b9b21574457"/>
   </p:sldIdLst>
   <p:sldSz cx="9144000" cy="6858000" type="screen4x3"/>
   <p:notesSz cx="6858000" cy="9144000"/>

--- a/research/poc/PP-04/artifacts/pp04-output.pptx
+++ b/research/poc/PP-04/artifacts/pp04-output.pptx
@@ -5,7 +5,7 @@
     <p:sldMasterId id="2147483648" r:id="rId1"/>
   </p:sldMasterIdLst>
   <p:sldIdLst>
-    <p:sldId id="256" r:id="R3ea05b9b21574457"/>
+    <p:sldId id="256" r:id="R953b2081d8614c1b"/>
   </p:sldIdLst>
   <p:sldSz cx="9144000" cy="6858000" type="screen4x3"/>
   <p:notesSz cx="6858000" cy="9144000"/>

--- a/research/poc/PP-04/artifacts/pp04-output.pptx
+++ b/research/poc/PP-04/artifacts/pp04-output.pptx
@@ -5,7 +5,7 @@
     <p:sldMasterId id="2147483648" r:id="rId1"/>
   </p:sldMasterIdLst>
   <p:sldIdLst>
-    <p:sldId id="256" r:id="R953b2081d8614c1b"/>
+    <p:sldId id="256" r:id="Rb41ad9ad72444252"/>
   </p:sldIdLst>
   <p:sldSz cx="9144000" cy="6858000" type="screen4x3"/>
   <p:notesSz cx="6858000" cy="9144000"/>
